--- a/presentations/08_weekly_summary_stnmamba.pptx
+++ b/presentations/08_weekly_summary_stnmamba.pptx
@@ -12,8 +12,8 @@
     <p:sldId id="257" r:id="rId3"/>
     <p:sldId id="258" r:id="rId4"/>
     <p:sldId id="286" r:id="rId5"/>
-    <p:sldId id="261" r:id="rId6"/>
-    <p:sldId id="288" r:id="rId7"/>
+    <p:sldId id="288" r:id="rId6"/>
+    <p:sldId id="293" r:id="rId7"/>
     <p:sldId id="290" r:id="rId8"/>
     <p:sldId id="291" r:id="rId9"/>
     <p:sldId id="292" r:id="rId10"/>
@@ -3888,7 +3888,7 @@
         <p:spPr>
           <a:xfrm>
             <a:off x="777240" y="1207008"/>
-            <a:ext cx="10424160" cy="1405513"/>
+            <a:ext cx="10424160" cy="933589"/>
           </a:xfrm>
           <a:prstGeom prst="rect">
             <a:avLst/>
@@ -3914,7 +3914,7 @@
             </a:pPr>
             <a:r>
               <a:rPr lang="en-US" noProof="0" dirty="0"/>
-              <a:t>Improve the quality of the model</a:t>
+              <a:t>Advance to VADMAMBA++</a:t>
             </a:r>
           </a:p>
           <a:p>
@@ -3930,25 +3930,8 @@
               </a:defRPr>
             </a:pPr>
             <a:r>
-              <a:rPr lang="en-US" noProof="0" dirty="0"/>
-              <a:t>Verify correct representation of Anomaly and Normal labels</a:t>
-            </a:r>
-          </a:p>
-          <a:p>
-            <a:pPr>
-              <a:spcAft>
-                <a:spcPts val="800"/>
-              </a:spcAft>
-              <a:defRPr sz="2400">
-                <a:solidFill>
-                  <a:srgbClr val="4B5563"/>
-                </a:solidFill>
-                <a:latin typeface="Aptos"/>
-              </a:defRPr>
-            </a:pPr>
-            <a:r>
               <a:rPr lang="en-US" dirty="0"/>
-              <a:t>Continue to next paper</a:t>
+              <a:t>Advance to M²S²L</a:t>
             </a:r>
             <a:endParaRPr lang="en-US" noProof="0" dirty="0"/>
           </a:p>
@@ -4640,147 +4623,511 @@
           </a:p>
         </p:txBody>
       </p:sp>
-      <p:sp>
-        <p:nvSpPr>
-          <p:cNvPr id="3" name="TextBox 2"/>
-          <p:cNvSpPr txBox="1"/>
-          <p:nvPr/>
-        </p:nvSpPr>
-        <p:spPr>
-          <a:xfrm>
-            <a:off x="777239" y="1207008"/>
-            <a:ext cx="1927379" cy="2349361"/>
-          </a:xfrm>
-          <a:prstGeom prst="rect">
-            <a:avLst/>
-          </a:prstGeom>
-          <a:noFill/>
-        </p:spPr>
-        <p:txBody>
-          <a:bodyPr wrap="square">
-            <a:spAutoFit/>
-          </a:bodyPr>
-          <a:lstStyle/>
-          <a:p>
-            <a:pPr algn="just">
-              <a:spcAft>
-                <a:spcPts val="800"/>
-              </a:spcAft>
-              <a:defRPr sz="2400">
-                <a:solidFill>
-                  <a:srgbClr val="4B5563"/>
-                </a:solidFill>
-                <a:latin typeface="Aptos"/>
-              </a:defRPr>
-            </a:pPr>
-            <a:r>
-              <a:rPr lang="en-US" noProof="0" dirty="0"/>
-              <a:t>20 epochs</a:t>
-            </a:r>
-          </a:p>
-          <a:p>
-            <a:pPr algn="just">
-              <a:spcAft>
-                <a:spcPts val="800"/>
-              </a:spcAft>
-              <a:defRPr sz="2400">
-                <a:solidFill>
-                  <a:srgbClr val="4B5563"/>
-                </a:solidFill>
-                <a:latin typeface="Aptos"/>
-              </a:defRPr>
-            </a:pPr>
-            <a:r>
-              <a:rPr lang="en-US" dirty="0" err="1"/>
-              <a:t>Pytorch</a:t>
-            </a:r>
-            <a:endParaRPr lang="en-US" dirty="0"/>
-          </a:p>
-          <a:p>
-            <a:pPr algn="just">
-              <a:spcAft>
-                <a:spcPts val="800"/>
-              </a:spcAft>
-              <a:defRPr sz="2400">
-                <a:solidFill>
-                  <a:srgbClr val="4B5563"/>
-                </a:solidFill>
-                <a:latin typeface="Aptos"/>
-              </a:defRPr>
-            </a:pPr>
-            <a:r>
-              <a:rPr lang="en-US" noProof="0" dirty="0"/>
-              <a:t>FlowNet2SD</a:t>
-            </a:r>
-          </a:p>
-          <a:p>
-            <a:pPr algn="just">
-              <a:spcAft>
-                <a:spcPts val="800"/>
-              </a:spcAft>
-              <a:defRPr sz="2400">
-                <a:solidFill>
-                  <a:srgbClr val="4B5563"/>
-                </a:solidFill>
-                <a:latin typeface="Aptos"/>
-              </a:defRPr>
-            </a:pPr>
-            <a:r>
-              <a:rPr lang="en-US" dirty="0" err="1"/>
-              <a:t>AdamW</a:t>
-            </a:r>
-            <a:endParaRPr lang="en-US" dirty="0"/>
-          </a:p>
-          <a:p>
-            <a:pPr algn="just">
-              <a:spcAft>
-                <a:spcPts val="800"/>
-              </a:spcAft>
-              <a:defRPr sz="2400">
-                <a:solidFill>
-                  <a:srgbClr val="4B5563"/>
-                </a:solidFill>
-                <a:latin typeface="Aptos"/>
-              </a:defRPr>
-            </a:pPr>
-            <a:r>
-              <a:rPr lang="en-US" noProof="0" dirty="0"/>
-              <a:t>Lr = 2e-4</a:t>
-            </a:r>
-          </a:p>
-        </p:txBody>
-      </p:sp>
-      <p:pic>
-        <p:nvPicPr>
-          <p:cNvPr id="5" name="Imagen 4">
+      <p:grpSp>
+        <p:nvGrpSpPr>
+          <p:cNvPr id="28" name="Grupo 27">
             <a:extLst>
               <a:ext uri="{FF2B5EF4-FFF2-40B4-BE49-F238E27FC236}">
-                <a16:creationId xmlns:a16="http://schemas.microsoft.com/office/drawing/2014/main" id="{0B7045C8-B3DC-5CE7-A32C-0899AB38558D}"/>
+                <a16:creationId xmlns:a16="http://schemas.microsoft.com/office/drawing/2014/main" id="{CC4F2B50-1C30-6BD3-E179-F679A3526C71}"/>
               </a:ext>
             </a:extLst>
           </p:cNvPr>
-          <p:cNvPicPr>
-            <a:picLocks noChangeAspect="1"/>
-          </p:cNvPicPr>
+          <p:cNvGrpSpPr/>
           <p:nvPr/>
-        </p:nvPicPr>
-        <p:blipFill>
-          <a:blip r:embed="rId2"/>
-          <a:stretch>
-            <a:fillRect/>
-          </a:stretch>
-        </p:blipFill>
-        <p:spPr>
+        </p:nvGrpSpPr>
+        <p:grpSpPr>
           <a:xfrm>
-            <a:off x="2612019" y="938046"/>
-            <a:ext cx="9030185" cy="5759526"/>
+            <a:off x="729103" y="1063443"/>
+            <a:ext cx="10745946" cy="5313189"/>
+            <a:chOff x="729103" y="837864"/>
+            <a:chExt cx="10745946" cy="5313189"/>
           </a:xfrm>
-          <a:prstGeom prst="rect">
-            <a:avLst/>
-          </a:prstGeom>
-        </p:spPr>
-      </p:pic>
+        </p:grpSpPr>
+        <p:pic>
+          <p:nvPicPr>
+            <p:cNvPr id="6" name="Imagen 5">
+              <a:extLst>
+                <a:ext uri="{FF2B5EF4-FFF2-40B4-BE49-F238E27FC236}">
+                  <a16:creationId xmlns:a16="http://schemas.microsoft.com/office/drawing/2014/main" id="{F5507F26-53B0-7381-1883-56CA7DEC7A36}"/>
+                </a:ext>
+              </a:extLst>
+            </p:cNvPr>
+            <p:cNvPicPr>
+              <a:picLocks noChangeAspect="1"/>
+            </p:cNvPicPr>
+            <p:nvPr/>
+          </p:nvPicPr>
+          <p:blipFill>
+            <a:blip r:embed="rId2"/>
+            <a:srcRect l="6255" t="3824" r="6105" b="7239"/>
+            <a:stretch/>
+          </p:blipFill>
+          <p:spPr>
+            <a:xfrm>
+              <a:off x="761329" y="894259"/>
+              <a:ext cx="3464021" cy="2534742"/>
+            </a:xfrm>
+            <a:prstGeom prst="rect">
+              <a:avLst/>
+            </a:prstGeom>
+          </p:spPr>
+        </p:pic>
+        <p:pic>
+          <p:nvPicPr>
+            <p:cNvPr id="8" name="Imagen 7">
+              <a:extLst>
+                <a:ext uri="{FF2B5EF4-FFF2-40B4-BE49-F238E27FC236}">
+                  <a16:creationId xmlns:a16="http://schemas.microsoft.com/office/drawing/2014/main" id="{33D25433-56DF-0570-C573-F7CB4A345452}"/>
+                </a:ext>
+              </a:extLst>
+            </p:cNvPr>
+            <p:cNvPicPr>
+              <a:picLocks noChangeAspect="1"/>
+            </p:cNvPicPr>
+            <p:nvPr/>
+          </p:nvPicPr>
+          <p:blipFill>
+            <a:blip r:embed="rId3"/>
+            <a:srcRect l="5273" t="4142" r="5176" b="6204"/>
+            <a:stretch/>
+          </p:blipFill>
+          <p:spPr>
+            <a:xfrm>
+              <a:off x="804238" y="3535919"/>
+              <a:ext cx="3427767" cy="2508214"/>
+            </a:xfrm>
+            <a:prstGeom prst="rect">
+              <a:avLst/>
+            </a:prstGeom>
+          </p:spPr>
+        </p:pic>
+        <p:pic>
+          <p:nvPicPr>
+            <p:cNvPr id="4" name="Imagen 3">
+              <a:extLst>
+                <a:ext uri="{FF2B5EF4-FFF2-40B4-BE49-F238E27FC236}">
+                  <a16:creationId xmlns:a16="http://schemas.microsoft.com/office/drawing/2014/main" id="{1E844B62-E4AC-D385-9FFB-7AA00B7F7687}"/>
+                </a:ext>
+              </a:extLst>
+            </p:cNvPr>
+            <p:cNvPicPr>
+              <a:picLocks noChangeAspect="1"/>
+            </p:cNvPicPr>
+            <p:nvPr/>
+          </p:nvPicPr>
+          <p:blipFill>
+            <a:blip r:embed="rId4"/>
+            <a:stretch>
+              <a:fillRect/>
+            </a:stretch>
+          </p:blipFill>
+          <p:spPr>
+            <a:xfrm>
+              <a:off x="4370198" y="857319"/>
+              <a:ext cx="3469541" cy="2505539"/>
+            </a:xfrm>
+            <a:prstGeom prst="rect">
+              <a:avLst/>
+            </a:prstGeom>
+          </p:spPr>
+        </p:pic>
+        <p:pic>
+          <p:nvPicPr>
+            <p:cNvPr id="7" name="Imagen 6">
+              <a:extLst>
+                <a:ext uri="{FF2B5EF4-FFF2-40B4-BE49-F238E27FC236}">
+                  <a16:creationId xmlns:a16="http://schemas.microsoft.com/office/drawing/2014/main" id="{F9127039-E79E-8018-974B-C40AA79867C8}"/>
+                </a:ext>
+              </a:extLst>
+            </p:cNvPr>
+            <p:cNvPicPr>
+              <a:picLocks noChangeAspect="1"/>
+            </p:cNvPicPr>
+            <p:nvPr/>
+          </p:nvPicPr>
+          <p:blipFill>
+            <a:blip r:embed="rId5"/>
+            <a:stretch>
+              <a:fillRect/>
+            </a:stretch>
+          </p:blipFill>
+          <p:spPr>
+            <a:xfrm>
+              <a:off x="4361229" y="3551678"/>
+              <a:ext cx="3488617" cy="2505540"/>
+            </a:xfrm>
+            <a:prstGeom prst="rect">
+              <a:avLst/>
+            </a:prstGeom>
+          </p:spPr>
+        </p:pic>
+        <p:sp>
+          <p:nvSpPr>
+            <p:cNvPr id="11" name="Rectángulo 10">
+              <a:extLst>
+                <a:ext uri="{FF2B5EF4-FFF2-40B4-BE49-F238E27FC236}">
+                  <a16:creationId xmlns:a16="http://schemas.microsoft.com/office/drawing/2014/main" id="{EB810C3A-7BE3-D678-FF32-280499381C60}"/>
+                </a:ext>
+              </a:extLst>
+            </p:cNvPr>
+            <p:cNvSpPr/>
+            <p:nvPr/>
+          </p:nvSpPr>
+          <p:spPr>
+            <a:xfrm>
+              <a:off x="729103" y="837864"/>
+              <a:ext cx="3552867" cy="5313188"/>
+            </a:xfrm>
+            <a:prstGeom prst="rect">
+              <a:avLst/>
+            </a:prstGeom>
+            <a:noFill/>
+          </p:spPr>
+          <p:style>
+            <a:lnRef idx="2">
+              <a:schemeClr val="accent1"/>
+            </a:lnRef>
+            <a:fillRef idx="1">
+              <a:schemeClr val="lt1"/>
+            </a:fillRef>
+            <a:effectRef idx="0">
+              <a:schemeClr val="accent1"/>
+            </a:effectRef>
+            <a:fontRef idx="minor">
+              <a:schemeClr val="dk1"/>
+            </a:fontRef>
+          </p:style>
+          <p:txBody>
+            <a:bodyPr rtlCol="0" anchor="ctr"/>
+            <a:lstStyle/>
+            <a:p>
+              <a:pPr algn="ctr"/>
+              <a:endParaRPr lang="en-US"/>
+            </a:p>
+          </p:txBody>
+        </p:sp>
+        <p:sp>
+          <p:nvSpPr>
+            <p:cNvPr id="12" name="Rectángulo 11">
+              <a:extLst>
+                <a:ext uri="{FF2B5EF4-FFF2-40B4-BE49-F238E27FC236}">
+                  <a16:creationId xmlns:a16="http://schemas.microsoft.com/office/drawing/2014/main" id="{FDD1A7F8-7C74-C486-9D16-35A6DA9EBE58}"/>
+                </a:ext>
+              </a:extLst>
+            </p:cNvPr>
+            <p:cNvSpPr/>
+            <p:nvPr/>
+          </p:nvSpPr>
+          <p:spPr>
+            <a:xfrm>
+              <a:off x="4360093" y="837865"/>
+              <a:ext cx="3489753" cy="5313188"/>
+            </a:xfrm>
+            <a:prstGeom prst="rect">
+              <a:avLst/>
+            </a:prstGeom>
+            <a:noFill/>
+          </p:spPr>
+          <p:style>
+            <a:lnRef idx="2">
+              <a:schemeClr val="accent2"/>
+            </a:lnRef>
+            <a:fillRef idx="1">
+              <a:schemeClr val="lt1"/>
+            </a:fillRef>
+            <a:effectRef idx="0">
+              <a:schemeClr val="accent2"/>
+            </a:effectRef>
+            <a:fontRef idx="minor">
+              <a:schemeClr val="dk1"/>
+            </a:fontRef>
+          </p:style>
+          <p:txBody>
+            <a:bodyPr rtlCol="0" anchor="ctr"/>
+            <a:lstStyle/>
+            <a:p>
+              <a:pPr algn="ctr"/>
+              <a:endParaRPr lang="en-US"/>
+            </a:p>
+          </p:txBody>
+        </p:sp>
+        <p:pic>
+          <p:nvPicPr>
+            <p:cNvPr id="20" name="Imagen 19">
+              <a:extLst>
+                <a:ext uri="{FF2B5EF4-FFF2-40B4-BE49-F238E27FC236}">
+                  <a16:creationId xmlns:a16="http://schemas.microsoft.com/office/drawing/2014/main" id="{27E94E17-1AE0-ED6E-96B4-F3635A2C82D1}"/>
+                </a:ext>
+              </a:extLst>
+            </p:cNvPr>
+            <p:cNvPicPr>
+              <a:picLocks noChangeAspect="1"/>
+            </p:cNvPicPr>
+            <p:nvPr/>
+          </p:nvPicPr>
+          <p:blipFill>
+            <a:blip r:embed="rId6"/>
+            <a:stretch>
+              <a:fillRect/>
+            </a:stretch>
+          </p:blipFill>
+          <p:spPr>
+            <a:xfrm>
+              <a:off x="7979073" y="837864"/>
+              <a:ext cx="3474044" cy="2524994"/>
+            </a:xfrm>
+            <a:prstGeom prst="rect">
+              <a:avLst/>
+            </a:prstGeom>
+          </p:spPr>
+        </p:pic>
+        <p:pic>
+          <p:nvPicPr>
+            <p:cNvPr id="22" name="Imagen 21">
+              <a:extLst>
+                <a:ext uri="{FF2B5EF4-FFF2-40B4-BE49-F238E27FC236}">
+                  <a16:creationId xmlns:a16="http://schemas.microsoft.com/office/drawing/2014/main" id="{20F5AC90-1C46-94C6-1FC4-9FF99905AD97}"/>
+                </a:ext>
+              </a:extLst>
+            </p:cNvPr>
+            <p:cNvPicPr>
+              <a:picLocks noChangeAspect="1"/>
+            </p:cNvPicPr>
+            <p:nvPr/>
+          </p:nvPicPr>
+          <p:blipFill>
+            <a:blip r:embed="rId7"/>
+            <a:stretch>
+              <a:fillRect/>
+            </a:stretch>
+          </p:blipFill>
+          <p:spPr>
+            <a:xfrm>
+              <a:off x="7993352" y="3551678"/>
+              <a:ext cx="3469545" cy="2505541"/>
+            </a:xfrm>
+            <a:prstGeom prst="rect">
+              <a:avLst/>
+            </a:prstGeom>
+          </p:spPr>
+        </p:pic>
+        <p:sp>
+          <p:nvSpPr>
+            <p:cNvPr id="23" name="Rectángulo 22">
+              <a:extLst>
+                <a:ext uri="{FF2B5EF4-FFF2-40B4-BE49-F238E27FC236}">
+                  <a16:creationId xmlns:a16="http://schemas.microsoft.com/office/drawing/2014/main" id="{11863178-14EB-C252-8618-7E69B2D2236B}"/>
+                </a:ext>
+              </a:extLst>
+            </p:cNvPr>
+            <p:cNvSpPr/>
+            <p:nvPr/>
+          </p:nvSpPr>
+          <p:spPr>
+            <a:xfrm>
+              <a:off x="7985296" y="837865"/>
+              <a:ext cx="3489753" cy="5313188"/>
+            </a:xfrm>
+            <a:prstGeom prst="rect">
+              <a:avLst/>
+            </a:prstGeom>
+            <a:noFill/>
+          </p:spPr>
+          <p:style>
+            <a:lnRef idx="2">
+              <a:schemeClr val="accent3"/>
+            </a:lnRef>
+            <a:fillRef idx="1">
+              <a:schemeClr val="lt1"/>
+            </a:fillRef>
+            <a:effectRef idx="0">
+              <a:schemeClr val="accent3"/>
+            </a:effectRef>
+            <a:fontRef idx="minor">
+              <a:schemeClr val="dk1"/>
+            </a:fontRef>
+          </p:style>
+          <p:txBody>
+            <a:bodyPr rtlCol="0" anchor="ctr"/>
+            <a:lstStyle/>
+            <a:p>
+              <a:pPr algn="ctr"/>
+              <a:endParaRPr lang="en-US"/>
+            </a:p>
+          </p:txBody>
+        </p:sp>
+        <p:sp>
+          <p:nvSpPr>
+            <p:cNvPr id="24" name="Rectángulo 23">
+              <a:extLst>
+                <a:ext uri="{FF2B5EF4-FFF2-40B4-BE49-F238E27FC236}">
+                  <a16:creationId xmlns:a16="http://schemas.microsoft.com/office/drawing/2014/main" id="{360190AA-F8C3-610A-5F70-D14250A4755A}"/>
+                </a:ext>
+              </a:extLst>
+            </p:cNvPr>
+            <p:cNvSpPr/>
+            <p:nvPr/>
+          </p:nvSpPr>
+          <p:spPr>
+            <a:xfrm>
+              <a:off x="2626383" y="2967335"/>
+              <a:ext cx="1474318" cy="461665"/>
+            </a:xfrm>
+            <a:prstGeom prst="rect">
+              <a:avLst/>
+            </a:prstGeom>
+            <a:noFill/>
+          </p:spPr>
+          <p:txBody>
+            <a:bodyPr wrap="square" lIns="91440" tIns="45720" rIns="91440" bIns="45720">
+              <a:spAutoFit/>
+            </a:bodyPr>
+            <a:lstStyle/>
+            <a:p>
+              <a:pPr algn="ctr"/>
+              <a:r>
+                <a:rPr lang="es-MX" sz="2400" b="1" dirty="0" err="1">
+                  <a:ln w="22225">
+                    <a:noFill/>
+                    <a:prstDash val="solid"/>
+                  </a:ln>
+                  <a:solidFill>
+                    <a:schemeClr val="tx2"/>
+                  </a:solidFill>
+                </a:rPr>
+                <a:t>Before</a:t>
+              </a:r>
+              <a:endParaRPr lang="es-MX" sz="2400" b="1" dirty="0">
+                <a:ln w="22225">
+                  <a:noFill/>
+                  <a:prstDash val="solid"/>
+                </a:ln>
+                <a:solidFill>
+                  <a:schemeClr val="tx2"/>
+                </a:solidFill>
+              </a:endParaRPr>
+            </a:p>
+          </p:txBody>
+        </p:sp>
+        <p:sp>
+          <p:nvSpPr>
+            <p:cNvPr id="26" name="Rectángulo 25">
+              <a:extLst>
+                <a:ext uri="{FF2B5EF4-FFF2-40B4-BE49-F238E27FC236}">
+                  <a16:creationId xmlns:a16="http://schemas.microsoft.com/office/drawing/2014/main" id="{803EF54D-791B-FF83-E0E2-CF90627D2CF3}"/>
+                </a:ext>
+              </a:extLst>
+            </p:cNvPr>
+            <p:cNvSpPr/>
+            <p:nvPr/>
+          </p:nvSpPr>
+          <p:spPr>
+            <a:xfrm>
+              <a:off x="6335678" y="2967336"/>
+              <a:ext cx="1474318" cy="461665"/>
+            </a:xfrm>
+            <a:prstGeom prst="rect">
+              <a:avLst/>
+            </a:prstGeom>
+            <a:noFill/>
+          </p:spPr>
+          <p:txBody>
+            <a:bodyPr wrap="square" lIns="91440" tIns="45720" rIns="91440" bIns="45720">
+              <a:spAutoFit/>
+            </a:bodyPr>
+            <a:lstStyle/>
+            <a:p>
+              <a:pPr algn="ctr"/>
+              <a:r>
+                <a:rPr lang="es-MX" sz="2400" b="1" dirty="0" err="1">
+                  <a:ln w="22225">
+                    <a:noFill/>
+                    <a:prstDash val="solid"/>
+                  </a:ln>
+                  <a:solidFill>
+                    <a:schemeClr val="accent2"/>
+                  </a:solidFill>
+                </a:rPr>
+                <a:t>Current</a:t>
+              </a:r>
+              <a:endParaRPr lang="es-MX" sz="2400" b="1" dirty="0">
+                <a:ln w="22225">
+                  <a:noFill/>
+                  <a:prstDash val="solid"/>
+                </a:ln>
+                <a:solidFill>
+                  <a:schemeClr val="accent2"/>
+                </a:solidFill>
+              </a:endParaRPr>
+            </a:p>
+          </p:txBody>
+        </p:sp>
+        <p:sp>
+          <p:nvSpPr>
+            <p:cNvPr id="27" name="Rectángulo 26">
+              <a:extLst>
+                <a:ext uri="{FF2B5EF4-FFF2-40B4-BE49-F238E27FC236}">
+                  <a16:creationId xmlns:a16="http://schemas.microsoft.com/office/drawing/2014/main" id="{9DA1D864-6FFE-5DC1-F55B-02C3D4F2D91B}"/>
+                </a:ext>
+              </a:extLst>
+            </p:cNvPr>
+            <p:cNvSpPr/>
+            <p:nvPr/>
+          </p:nvSpPr>
+          <p:spPr>
+            <a:xfrm>
+              <a:off x="9972604" y="2967336"/>
+              <a:ext cx="1474318" cy="461665"/>
+            </a:xfrm>
+            <a:prstGeom prst="rect">
+              <a:avLst/>
+            </a:prstGeom>
+            <a:noFill/>
+          </p:spPr>
+          <p:txBody>
+            <a:bodyPr wrap="square" lIns="91440" tIns="45720" rIns="91440" bIns="45720">
+              <a:spAutoFit/>
+            </a:bodyPr>
+            <a:lstStyle/>
+            <a:p>
+              <a:pPr algn="ctr"/>
+              <a:r>
+                <a:rPr lang="es-MX" sz="2400" b="1" dirty="0" err="1">
+                  <a:ln w="22225">
+                    <a:noFill/>
+                    <a:prstDash val="solid"/>
+                  </a:ln>
+                  <a:solidFill>
+                    <a:schemeClr val="accent3">
+                      <a:lumMod val="60000"/>
+                      <a:lumOff val="40000"/>
+                    </a:schemeClr>
+                  </a:solidFill>
+                </a:rPr>
+                <a:t>Paper</a:t>
+              </a:r>
+              <a:endParaRPr lang="es-MX" sz="2400" b="1" dirty="0">
+                <a:ln w="22225">
+                  <a:noFill/>
+                  <a:prstDash val="solid"/>
+                </a:ln>
+                <a:solidFill>
+                  <a:schemeClr val="accent3">
+                    <a:lumMod val="60000"/>
+                    <a:lumOff val="40000"/>
+                  </a:schemeClr>
+                </a:solidFill>
+              </a:endParaRPr>
+            </a:p>
+          </p:txBody>
+        </p:sp>
+      </p:grpSp>
     </p:spTree>
+    <p:extLst>
+      <p:ext uri="{BB962C8B-B14F-4D97-AF65-F5344CB8AC3E}">
+        <p14:creationId xmlns:p14="http://schemas.microsoft.com/office/powerpoint/2010/main" val="116425835"/>
+      </p:ext>
+    </p:extLst>
   </p:cSld>
   <p:clrMapOvr>
     <a:masterClrMapping/>
@@ -4852,10 +5199,10 @@
       </p:sp>
       <p:pic>
         <p:nvPicPr>
-          <p:cNvPr id="6" name="Imagen 5">
+          <p:cNvPr id="10" name="Imagen 9">
             <a:extLst>
               <a:ext uri="{FF2B5EF4-FFF2-40B4-BE49-F238E27FC236}">
-                <a16:creationId xmlns:a16="http://schemas.microsoft.com/office/drawing/2014/main" id="{F5507F26-53B0-7381-1883-56CA7DEC7A36}"/>
+                <a16:creationId xmlns:a16="http://schemas.microsoft.com/office/drawing/2014/main" id="{507440D7-E727-DC06-9878-93ED3DED6834}"/>
               </a:ext>
             </a:extLst>
           </p:cNvPr>
@@ -4872,8 +5219,8 @@
         </p:blipFill>
         <p:spPr>
           <a:xfrm>
-            <a:off x="308851" y="1406458"/>
-            <a:ext cx="5759746" cy="4153113"/>
+            <a:off x="6096000" y="1752911"/>
+            <a:ext cx="5285007" cy="3833716"/>
           </a:xfrm>
           <a:prstGeom prst="rect">
             <a:avLst/>
@@ -4882,10 +5229,10 @@
       </p:pic>
       <p:pic>
         <p:nvPicPr>
-          <p:cNvPr id="8" name="Imagen 7">
+          <p:cNvPr id="14" name="Imagen 13">
             <a:extLst>
               <a:ext uri="{FF2B5EF4-FFF2-40B4-BE49-F238E27FC236}">
-                <a16:creationId xmlns:a16="http://schemas.microsoft.com/office/drawing/2014/main" id="{33D25433-56DF-0570-C573-F7CB4A345452}"/>
+                <a16:creationId xmlns:a16="http://schemas.microsoft.com/office/drawing/2014/main" id="{E6E06EA5-BD9E-B91A-C0F6-DFE56E3BBAFB}"/>
               </a:ext>
             </a:extLst>
           </p:cNvPr>
@@ -4902,8 +5249,8 @@
         </p:blipFill>
         <p:spPr>
           <a:xfrm>
-            <a:off x="6200934" y="1406458"/>
-            <a:ext cx="5682215" cy="4153113"/>
+            <a:off x="629455" y="1752910"/>
+            <a:ext cx="5339659" cy="3866420"/>
           </a:xfrm>
           <a:prstGeom prst="rect">
             <a:avLst/>
@@ -4913,7 +5260,7 @@
     </p:spTree>
     <p:extLst>
       <p:ext uri="{BB962C8B-B14F-4D97-AF65-F5344CB8AC3E}">
-        <p14:creationId xmlns:p14="http://schemas.microsoft.com/office/powerpoint/2010/main" val="116425835"/>
+        <p14:creationId xmlns:p14="http://schemas.microsoft.com/office/powerpoint/2010/main" val="77756459"/>
       </p:ext>
     </p:extLst>
   </p:cSld>
